--- a/2610/files/배경테마_냅킨.pptx
+++ b/2610/files/배경테마_냅킨.pptx
@@ -4632,7 +4632,7 @@
           <a:lstStyle/>
           <a:p>
             <a:pPr algn="ctr"/>
-            <a:endParaRPr lang="ko-KR" altLang="en-US"/>
+            <a:endParaRPr lang="ko-KR" altLang="en-US" dirty="0"/>
           </a:p>
         </p:txBody>
       </p:sp>
@@ -4681,6 +4681,226 @@
           </a:extLst>
         </p:spPr>
       </p:pic>
+      <p:sp>
+        <p:nvSpPr>
+          <p:cNvPr id="4" name="직사각형 3">
+            <a:extLst>
+              <a:ext uri="{FF2B5EF4-FFF2-40B4-BE49-F238E27FC236}">
+                <a16:creationId xmlns:a16="http://schemas.microsoft.com/office/drawing/2014/main" id="{127DFA7A-C337-FB49-87D7-9308F6A29C59}"/>
+              </a:ext>
+            </a:extLst>
+          </p:cNvPr>
+          <p:cNvSpPr/>
+          <p:nvPr/>
+        </p:nvSpPr>
+        <p:spPr>
+          <a:xfrm>
+            <a:off x="1236742" y="1394624"/>
+            <a:ext cx="1822222" cy="965127"/>
+          </a:xfrm>
+          <a:prstGeom prst="rect">
+            <a:avLst/>
+          </a:prstGeom>
+          <a:solidFill>
+            <a:schemeClr val="bg1"/>
+          </a:solidFill>
+          <a:ln>
+            <a:noFill/>
+          </a:ln>
+        </p:spPr>
+        <p:style>
+          <a:lnRef idx="2">
+            <a:schemeClr val="accent1">
+              <a:shade val="15000"/>
+            </a:schemeClr>
+          </a:lnRef>
+          <a:fillRef idx="1">
+            <a:schemeClr val="accent1"/>
+          </a:fillRef>
+          <a:effectRef idx="0">
+            <a:schemeClr val="accent1"/>
+          </a:effectRef>
+          <a:fontRef idx="minor">
+            <a:schemeClr val="lt1"/>
+          </a:fontRef>
+        </p:style>
+        <p:txBody>
+          <a:bodyPr rtlCol="0" anchor="ctr"/>
+          <a:lstStyle/>
+          <a:p>
+            <a:pPr algn="ctr"/>
+            <a:endParaRPr lang="ko-KR" altLang="en-US" dirty="0"/>
+          </a:p>
+        </p:txBody>
+      </p:sp>
+      <p:sp>
+        <p:nvSpPr>
+          <p:cNvPr id="9" name="직사각형 8">
+            <a:extLst>
+              <a:ext uri="{FF2B5EF4-FFF2-40B4-BE49-F238E27FC236}">
+                <a16:creationId xmlns:a16="http://schemas.microsoft.com/office/drawing/2014/main" id="{12B730B6-B82D-11DC-D97C-46DF7ECE58EC}"/>
+              </a:ext>
+            </a:extLst>
+          </p:cNvPr>
+          <p:cNvSpPr/>
+          <p:nvPr/>
+        </p:nvSpPr>
+        <p:spPr>
+          <a:xfrm>
+            <a:off x="1118331" y="3960207"/>
+            <a:ext cx="2045888" cy="965127"/>
+          </a:xfrm>
+          <a:prstGeom prst="rect">
+            <a:avLst/>
+          </a:prstGeom>
+          <a:solidFill>
+            <a:srgbClr val="FFFFFF"/>
+          </a:solidFill>
+          <a:ln>
+            <a:noFill/>
+          </a:ln>
+        </p:spPr>
+        <p:style>
+          <a:lnRef idx="2">
+            <a:schemeClr val="accent1">
+              <a:shade val="15000"/>
+            </a:schemeClr>
+          </a:lnRef>
+          <a:fillRef idx="1">
+            <a:schemeClr val="accent1"/>
+          </a:fillRef>
+          <a:effectRef idx="0">
+            <a:schemeClr val="accent1"/>
+          </a:effectRef>
+          <a:fontRef idx="minor">
+            <a:schemeClr val="lt1"/>
+          </a:fontRef>
+        </p:style>
+        <p:txBody>
+          <a:bodyPr rtlCol="0" anchor="ctr"/>
+          <a:lstStyle/>
+          <a:p>
+            <a:pPr algn="ctr"/>
+            <a:endParaRPr lang="ko-KR" altLang="en-US"/>
+          </a:p>
+        </p:txBody>
+      </p:sp>
+      <p:grpSp>
+        <p:nvGrpSpPr>
+          <p:cNvPr id="12" name="그룹 11">
+            <a:extLst>
+              <a:ext uri="{FF2B5EF4-FFF2-40B4-BE49-F238E27FC236}">
+                <a16:creationId xmlns:a16="http://schemas.microsoft.com/office/drawing/2014/main" id="{033621A8-342F-3AD6-B27D-A6D11F404828}"/>
+              </a:ext>
+            </a:extLst>
+          </p:cNvPr>
+          <p:cNvGrpSpPr/>
+          <p:nvPr/>
+        </p:nvGrpSpPr>
+        <p:grpSpPr>
+          <a:xfrm>
+            <a:off x="1236742" y="4110733"/>
+            <a:ext cx="1809067" cy="692659"/>
+            <a:chOff x="1236742" y="4110733"/>
+            <a:chExt cx="1809067" cy="692659"/>
+          </a:xfrm>
+        </p:grpSpPr>
+        <p:sp>
+          <p:nvSpPr>
+            <p:cNvPr id="10" name="TextBox 9">
+              <a:extLst>
+                <a:ext uri="{FF2B5EF4-FFF2-40B4-BE49-F238E27FC236}">
+                  <a16:creationId xmlns:a16="http://schemas.microsoft.com/office/drawing/2014/main" id="{B9CB1DB6-CFF6-11AA-69D4-DB22B439EF31}"/>
+                </a:ext>
+              </a:extLst>
+            </p:cNvPr>
+            <p:cNvSpPr txBox="1"/>
+            <p:nvPr/>
+          </p:nvSpPr>
+          <p:spPr>
+            <a:xfrm>
+              <a:off x="1486723" y="4110733"/>
+              <a:ext cx="1309105" cy="369332"/>
+            </a:xfrm>
+            <a:prstGeom prst="rect">
+              <a:avLst/>
+            </a:prstGeom>
+            <a:noFill/>
+          </p:spPr>
+          <p:txBody>
+            <a:bodyPr wrap="square" rtlCol="0">
+              <a:spAutoFit/>
+            </a:bodyPr>
+            <a:lstStyle/>
+            <a:p>
+              <a:pPr algn="ctr"/>
+              <a:r>
+                <a:rPr lang="ko-KR" altLang="en-US" spc="-200" dirty="0">
+                  <a:solidFill>
+                    <a:srgbClr val="F26B43"/>
+                  </a:solidFill>
+                  <a:latin typeface="에스코어 드림 5 Medium" panose="020B0503030302020204" pitchFamily="34" charset="-127"/>
+                  <a:ea typeface="에스코어 드림 5 Medium" panose="020B0503030302020204" pitchFamily="34" charset="-127"/>
+                </a:rPr>
+                <a:t>신청 접수</a:t>
+              </a:r>
+            </a:p>
+          </p:txBody>
+        </p:sp>
+        <p:sp>
+          <p:nvSpPr>
+            <p:cNvPr id="11" name="TextBox 10">
+              <a:extLst>
+                <a:ext uri="{FF2B5EF4-FFF2-40B4-BE49-F238E27FC236}">
+                  <a16:creationId xmlns:a16="http://schemas.microsoft.com/office/drawing/2014/main" id="{802DA395-166B-2DED-8D97-585C0F7519BB}"/>
+                </a:ext>
+              </a:extLst>
+            </p:cNvPr>
+            <p:cNvSpPr txBox="1"/>
+            <p:nvPr/>
+          </p:nvSpPr>
+          <p:spPr>
+            <a:xfrm>
+              <a:off x="1236742" y="4526393"/>
+              <a:ext cx="1809067" cy="276999"/>
+            </a:xfrm>
+            <a:prstGeom prst="rect">
+              <a:avLst/>
+            </a:prstGeom>
+            <a:noFill/>
+          </p:spPr>
+          <p:txBody>
+            <a:bodyPr wrap="square" rtlCol="0">
+              <a:spAutoFit/>
+            </a:bodyPr>
+            <a:lstStyle/>
+            <a:p>
+              <a:pPr algn="ctr"/>
+              <a:r>
+                <a:rPr lang="ko-KR" altLang="en-US" sz="1200" spc="-150" dirty="0">
+                  <a:latin typeface="에스코어 드림 4 Regular" panose="020B0503030302020204" pitchFamily="34" charset="-127"/>
+                  <a:ea typeface="에스코어 드림 4 Regular" panose="020B0503030302020204" pitchFamily="34" charset="-127"/>
+                </a:rPr>
+                <a:t>시</a:t>
+              </a:r>
+              <a:r>
+                <a:rPr lang="en-US" altLang="ko-KR" sz="1200" spc="-150" dirty="0">
+                  <a:latin typeface="에스코어 드림 4 Regular" panose="020B0503030302020204" pitchFamily="34" charset="-127"/>
+                  <a:ea typeface="에스코어 드림 4 Regular" panose="020B0503030302020204" pitchFamily="34" charset="-127"/>
+                </a:rPr>
+                <a:t>·</a:t>
+              </a:r>
+              <a:r>
+                <a:rPr lang="ko-KR" altLang="en-US" sz="1200" spc="-150" dirty="0">
+                  <a:latin typeface="에스코어 드림 4 Regular" panose="020B0503030302020204" pitchFamily="34" charset="-127"/>
+                  <a:ea typeface="에스코어 드림 4 Regular" panose="020B0503030302020204" pitchFamily="34" charset="-127"/>
+                </a:rPr>
+                <a:t>도지사에게 신청서제출</a:t>
+              </a:r>
+            </a:p>
+          </p:txBody>
+        </p:sp>
+      </p:grpSp>
     </p:spTree>
     <p:extLst>
       <p:ext uri="{BB962C8B-B14F-4D97-AF65-F5344CB8AC3E}">
